--- a/data/생성형 AI 소프트웨어공학/생성형AI소프트웨어공학_3강.pptx
+++ b/data/생성형 AI 소프트웨어공학/생성형AI소프트웨어공학_3강.pptx
@@ -532,21 +532,14 @@
           <a:p>
             <a:r>
               <a:rPr lang="ko-KR"/>
-              <a:t>(학생들이 자리 잡는 동안 이 화면을 띄워 두고 정시에 시작합니다.)</a:t>
+              <a:t>3강 시작합니다. 지난주에 여러분 노트북에 AI를 연결하고 첫 지시까지 내렸죠. 그때 옆 사람과 temp.py 결과가 조금씩 달랐던 것, 기억나시나요? 어떤 사람은 함수 하나만 있고, 어떤 사람은 설명 주석이 붙어 있고. 오늘은 그 이유부터 파고듭니다.</a:t>
             </a:r>
           </a:p>
           <a:p/>
           <a:p>
             <a:r>
               <a:rPr lang="ko-KR"/>
-              <a:t>3강 시작합니다. 지난주에 여러분 노트북에 AI를 연결하고 첫 지시까지 내렸죠. 그때 옆 사람과 temp.py 결과가 조금씩 달랐던 것, 기억나시나요? 어떤 사람은 함수 하나만 있고, 어떤 사람은 설명 주석이 붙어 있고. 오늘은 그 이유부터 파고듭니다.</a:t>
-            </a:r>
-          </a:p>
-          <a:p/>
-          <a:p>
-            <a:r>
-              <a:rPr lang="ko-KR"/>
-              <a:t>오늘 수업은 이 과목의 핵심 기술이 시작되는 날입니다. 1부에서 생성형 AI가 어떻게 답을 만들어 내는지 원리를 봅니다. 수식은 하나도 없습니다. 왜 같은 지시에 다른 답이 나오는지, 왜 가끔 그럴듯한 거짓말을 하는지, 이 두 가지를 이해하는 게 목표입니다. 2부에서는 그 원리 위에서 지시문(AI에게 시키는 글, 영어로 프롬프트)의 네 기둥, 역할·맥락·요구·형식을 배웁니다. 3부 실습에서는 같은 기능을 세 가지 지시문으로 시켜서 결과가 얼마나 달라지는지 직접 실험합니다.</a:t>
+              <a:t>오늘 수업은 이 과목의 핵심 기술이 시작되는 날입니다. 1부에서 생성형 AI가 어떻게 답을 만들어 내는지 원리를 봅니다. 수식은 하나도 없습니다. 왜 같은 지시에 다른 답이 나오는지, 왜 가끔 그럴듯한 거짓말을 하는지, 이 두 가지를 이해하는 게 목표입니다. 2부에서는 그 원리 위에서 지시문(AI에게 시키는 글, 영어로 프롬프트)의 네 기둥, 역할, 맥락, 요구, 형식을 배웁니다. 3부 실습에서는 같은 기능을 세 가지 지시문으로 시켜서 결과가 얼마나 달라지는지 직접 실험합니다.</a:t>
             </a:r>
           </a:p>
           <a:p/>
@@ -554,13 +547,6 @@
             <a:r>
               <a:rPr lang="ko-KR"/>
               <a:t>그리고 오늘 첫 번째 과제가 나갑니다. 실습과 같은 방식의 비교 실험 보고서입니다. 실습을 제대로 따라오면 과제의 절반은 오늘 끝나는 셈이니 집중해 주세요.</a:t>
-            </a:r>
-          </a:p>
-          <a:p/>
-          <a:p>
-            <a:r>
-              <a:rPr lang="ko-KR"/>
-              <a:t>(지난주 환경이 안 된 학생이 있는지 손 들게 해서 파악. 있으면 실습 시작 전 쉬는 시간에 개별 지원.)</a:t>
             </a:r>
           </a:p>
         </p:txBody>
@@ -647,14 +633,14 @@
           <a:p>
             <a:r>
               <a:rPr lang="ko-KR"/>
-              <a:t>지난 시간 요약입니다. 왼쪽 세 줄. 정답 프로세스 모델은 없고 상황이 모델을 고른다. AI 시대의 개발은 지시 → 생성 → 확인 → 수정의 초소형 스프린트 반복이다. 그리고 여러분 VS Code에는 AI 엔진이 연결됐다. 내 Gemini 키와 수업 공용 Z.ai 키, 두 개를 드롭다운으로 바꿔 쓰는 것까지 했죠. 오늘은 그 AI를 '잘 부리는 말'을 배웁니다.</a:t>
+              <a:t>지난 시간 요약입니다. 왼쪽 세 줄. 정답 프로세스 모델은 없고 상황이 모델을 고른다. AI 시대의 개발은 지시, 생성, 확인, 수정의 초소형 스프린트 반복이다. 그리고 여러분 VS Code에는 AI 엔진이 연결됐다. 내 Gemini 키와 수업 공용 Z.ai 키, 두 개를 드롭다운으로 바꿔 쓰는 것까지 했죠. 오늘은 그 AI를 '잘 부리는 말'을 배웁니다.</a:t>
             </a:r>
           </a:p>
           <a:p/>
           <a:p>
             <a:r>
               <a:rPr lang="ko-KR"/>
-              <a:t>이번 주 성취 기준 세 가지. 첫째, 생성형 AI가 답을 만드는 원리와 세 가지 한계(비결정성, 환각, 지식의 경계)를 설명할 수 있다. 용어가 낯설죠? 1부에서 하나씩 쉬운 말로 풉니다. 둘째, 역할·맥락·요구·형식 네 기둥을 갖춘 지시문을 쓸 수 있다. 셋째, 같은 기능을 다른 지시문으로 시켜 보고 그 차이를 근거를 들어 분석할 수 있다.</a:t>
+              <a:t>이번 주 성취 기준 세 가지. 첫째, 생성형 AI가 답을 만드는 원리와 세 가지 한계(비결정성, 환각, 지식의 경계)를 설명할 수 있다. 용어가 낯설죠? 1부에서 하나씩 쉬운 말로 풉니다. 둘째, 역할, 맥락, 요구, 형식 네 기둥을 갖춘 지시문을 쓸 수 있다. 셋째, 같은 기능을 다른 지시문으로 시켜 보고 그 차이를 근거를 들어 분석할 수 있다.</a:t>
             </a:r>
           </a:p>
           <a:p/>
@@ -751,13 +737,6 @@
               <a:t>1부, 생성형 AI의 이해입니다. 도구를 잘 쓰려면 도구의 원리를 알아야 합니다. 자동차 정비사가 될 필요는 없지만, 액셀과 브레이크가 뭘 하는지는 알아야 운전하죠. 오늘 다룰 원리는 딱 그 수준입니다. 수식 없이, 그러나 정확하게, AI가 답을 만들어 내는 단 하나의 동작과, 거기서 필연적으로 따라 나오는 세 가지 한계입니다.</a:t>
             </a:r>
           </a:p>
-          <a:p/>
-          <a:p>
-            <a:r>
-              <a:rPr lang="ko-KR"/>
-              <a:t>(약 30분 예상.)</a:t>
-            </a:r>
-          </a:p>
         </p:txBody>
       </p:sp>
       <p:sp>
@@ -1368,7 +1347,7 @@
           <a:p>
             <a:r>
               <a:rPr lang="ko-KR"/>
-              <a:t>마지막 원리 하나. 채팅처럼 보이니까 AI가 대화를 '기억'한다고 느끼기 쉬운데, 실제 구조는 다릅니다. 매 답변마다 지금까지의 대화 전체를 처음부터 다시 읽습니다. 위쪽 그림을 보세요. 첫 답변 전에는 지시 ①만 읽고, 두 번째 답변 전에는 지시 ①, 답 ①, 지시 ②를 전부 다시 읽고, 세 번째는 그 앞 것까지 다 다시 읽습니다. 턴이 갈수록 읽어야 할 양이 계속 자라는 구조예요. 기억이 아니라 '재독'입니다. 매번 처음부터 다시 읽는 거죠.</a:t>
+              <a:t>마지막 원리 하나. 채팅처럼 보이니까 AI가 대화를 '기억'한다고 느끼기 쉬운데, 실제 구조는 다릅니다. 매 답변마다 지금까지의 대화 전체를 처음부터 다시 읽습니다. 위쪽 그림을 보세요. 첫 답변 전에는 지시 1만 읽고, 두 번째 답변 전에는 지시 1, 답 1, 지시 2를 전부 다시 읽고, 세 번째는 그 앞 것까지 다 다시 읽습니다. 턴이 갈수록 읽어야 할 양이 계속 자라는 구조예요. 기억이 아니라 '재독'입니다. 매번 처음부터 다시 읽는 거죠.</a:t>
             </a:r>
           </a:p>
           <a:p/>
@@ -1507,13 +1486,6 @@
               <a:t>그럼 이 습관들을 실제 문장에 어떻게 담느냐. 아래 박스, 그 틀이 역할, 맥락, 요구, 형식, 네 기둥의 지시문 구조입니다. 2부에서 하나씩 세워 봅시다.</a:t>
             </a:r>
           </a:p>
-          <a:p/>
-          <a:p>
-            <a:r>
-              <a:rPr lang="ko-KR"/>
-              <a:t>(여기서 5분 휴식.)</a:t>
-            </a:r>
-          </a:p>
         </p:txBody>
       </p:sp>
       <p:sp>
@@ -1601,13 +1573,6 @@
               <a:t>2부, 지시문 작성 기초입니다. '프롬프트 엔지니어링'이라는 거창한 말도 있지만, 본질은 단순합니다. 1부에서 본 대로 AI는 빈칸을 그럴듯하게 채우는 쪽으로 움직입니다. 그러니 좋은 지시문이란 '중요한 빈칸을 내가 미리 채운 지시문'입니다. 그 빈칸을 빠짐없이 점검하는 틀이 네 기둥, 역할, 맥락, 요구, 형식입니다.</a:t>
             </a:r>
           </a:p>
-          <a:p/>
-          <a:p>
-            <a:r>
-              <a:rPr lang="ko-KR"/>
-              <a:t>(약 30분 예상.)</a:t>
-            </a:r>
-          </a:p>
         </p:txBody>
       </p:sp>
       <p:sp>
@@ -1821,7 +1786,7 @@
           <a:p>
             <a:r>
               <a:rPr lang="ko-KR"/>
-              <a:t>요구, Task, 무엇을 할지, 통과·불통과를 판정할 수 있는 구체적 동사와 결과물로 말합니다. 예: "…를 반환하는 함수를 작성."</a:t>
+              <a:t>요구, Task, 무엇을 할지, 통과, 불통과를 판정할 수 있는 구체적 동사와 결과물로 말합니다. 예: "…를 반환하는 함수를 작성."</a:t>
             </a:r>
           </a:p>
           <a:p/>
@@ -2601,13 +2566,6 @@
               <a:t>이 실습 형식이 그대로 과제 1이 되니, 오늘 손을 제대로 움직인 사람은 과제의 절반을 끝내고 가는 셈입니다. 노트북 준비하시고, VS Code에서 지난주 hello-sw 폴더를 열고, Cline 패널을 열어 두세요. Cline이 지난주처럼 "안녕"에 대답하는지 한 번 확인하고 시작합니다. 엔진은 수업 공용 Z.ai(glm-5.3)로 맞춰 두세요. 설정 톱니바퀴를 눌러 API Provider가 OpenAI Compatible인지만 보면 됩니다. 2강 25쪽 그대로입니다. 공용 키가 막히면 Google Gemini로 돌려 내 키로 해도 실험은 됩니다. 다만 세 실험은 같은 엔진으로 해야 비교가 됩니다.</a:t>
             </a:r>
           </a:p>
-          <a:p/>
-          <a:p>
-            <a:r>
-              <a:rPr lang="ko-KR"/>
-              <a:t>(약 60~70분 예상. 지난주 환경이 안 되는 학생은 옆 사람 화면으로 실험을 같이 보고, 실습 후 개별 지원.)</a:t>
-            </a:r>
-          </a:p>
         </p:txBody>
       </p:sp>
       <p:sp>
@@ -2800,42 +2758,42 @@
           <a:p>
             <a:r>
               <a:rPr lang="ko-KR"/>
-              <a:t>실험 하나를 돌리는 순서입니다. A·B·C 세 번 다 같은 순서로 반복하니 여기서 확실히 익혀 두세요.</a:t>
+              <a:t>실험 하나를 돌리는 순서입니다. A, B, C 세 번 다 같은 순서로 반복하니 여기서 확실히 익혀 두세요.</a:t>
             </a:r>
           </a:p>
           <a:p/>
           <a:p>
             <a:r>
               <a:rPr lang="ko-KR"/>
-              <a:t>①번, 새 대화. Cline 패널 위쪽에 아이콘이 몇 개 있는데, 그중 더하기 모양 '＋'가 New Task, 새 대화입니다. 왼쪽 위 그림은 그 아이콘 배치를 그린 구성도입니다. 실험 A, B, C 각각 시작할 때 반드시 이 버튼을 먼저 누릅니다. 이유는 아까 말했죠. 앞 대화가 남아 있으면 다음 실험이 오염됩니다.</a:t>
+              <a:t>1번, 새 대화. Cline 패널 위쪽에 아이콘이 몇 개 있는데, 그중 더하기 모양이 New Task, 새 대화입니다. 왼쪽 위 그림은 그 아이콘 배치를 그린 구성도입니다. 실험 A, B, C 각각 시작할 때 반드시 이 버튼을 먼저 누릅니다. 이유는 아까 말했죠. 앞 대화가 남아 있으면 다음 실험이 오염됩니다.</a:t>
             </a:r>
           </a:p>
           <a:p/>
           <a:p>
             <a:r>
               <a:rPr lang="ko-KR"/>
-              <a:t>②번, 지시문 붙여넣기. 왼쪽 가운데 그림이 Cline 패널 맨 아래 입력창입니다. 슬라이드에 있는 지시문을 그대로 복사해서 붙여넣고 Enter. 오타 하나가 결과를 바꾸니 직접 치지 말고 복사하세요. LMS에 지시문 텍스트를 올려 두었으니 거기서 복사해도 됩니다.</a:t>
+              <a:t>2번, 지시문 붙여넣기. 왼쪽 가운데 그림이 Cline 패널 맨 아래 입력창입니다. 슬라이드에 있는 지시문을 그대로 복사해서 붙여넣고 Enter. 오타 하나가 결과를 바꾸니 직접 치지 말고 복사하세요. LMS에 지시문 텍스트를 올려 두었으니 거기서 복사해도 됩니다.</a:t>
             </a:r>
           </a:p>
           <a:p/>
           <a:p>
             <a:r>
               <a:rPr lang="ko-KR"/>
-              <a:t>③번, 승인. Cline은 파일을 만들기 전에 "이 파일을 이렇게 만들겠다"며 내용을 보여 주고 기다립니다. 오른쪽 그림은 명령을 실행하기 전 승인을 기다리는 화면 예시입니다. 무조건 누르지 말고 훑어보고 Save 또는 Approve. 파일이 생기면 왼쪽 탐색기에 나타납니다.</a:t>
+              <a:t>3번, 승인. Cline은 파일을 만들기 전에 "이 파일을 이렇게 만들겠다"며 내용을 보여 주고 기다립니다. 오른쪽 그림은 명령을 실행하기 전 승인을 기다리는 화면 예시입니다. 무조건 누르지 말고 훑어보고 Save 또는 Approve. 파일이 생기면 왼쪽 탐색기에 나타납니다.</a:t>
             </a:r>
           </a:p>
           <a:p/>
           <a:p>
             <a:r>
               <a:rPr lang="ko-KR"/>
-              <a:t>④번, 실행. VS Code 터미널(Ctrl+`)에서 python 파일이름.py. 실행이 되는지, 무엇이 찍히는지 관찰합니다. 오류가 나도 그것 자체가 관찰 데이터입니다. 지우지 말고 적어 두세요.</a:t>
+              <a:t>4번, 실행. VS Code 터미널(Ctrl+백틱)에서 python 파일이름.py. 실행이 되는지, 무엇이 찍히는지 관찰합니다. 오류가 나도 그것 자체가 관찰 데이터입니다. 지우지 말고 적어 두세요.</a:t>
             </a:r>
           </a:p>
           <a:p/>
           <a:p>
             <a:r>
               <a:rPr lang="ko-KR"/>
-              <a:t>⑤번, 파일 이름 맞추기. AI가 grade_calculator.py 같은 다른 이름으로 만들었으면, 탐색기에서 그 파일을 클릭하고 F2 키를 누르면 이름을 바꿀 수 있습니다. gradeA.py, gradeB.py로. C는 지시문에 파일 이름이 들어 있어서 그대로 나옵니다.</a:t>
+              <a:t>5번, 파일 이름 맞추기. AI가 grade_calculator.py 같은 다른 이름으로 만들었으면, 탐색기에서 그 파일을 클릭하고 F2 키를 누르면 이름을 바꿀 수 있습니다. gradeA.py, gradeB.py로. C는 지시문에 파일 이름이 들어 있어서 그대로 나옵니다.</a:t>
             </a:r>
           </a:p>
           <a:p/>
@@ -2934,21 +2892,21 @@
           <a:p>
             <a:r>
               <a:rPr lang="ko-KR"/>
-              <a:t>예상되는 관찰 두 가지. 첫째, 형태 자체가 제각각일 겁니다. 함수 하나만 있는 사람, input으로 점수를 물어보는 사람, 여러 점수를 반복문으로 도는 사람. 둘째, 90점의 학점이나 파일·함수 이름이 사람마다 다를 겁니다. 내가 안 정했으니 AI가 확률에서 뽑은 값이고, 1부에서 배운 대로 뽑기는 매번 다르니까요.</a:t>
+              <a:t>예상되는 관찰 두 가지. 첫째, 형태 자체가 제각각일 겁니다. 함수 하나만 있는 사람, input으로 점수를 물어보는 사람, 여러 점수를 반복문으로 도는 사람. 둘째, 90점의 학점이나 파일, 함수 이름이 사람마다 다를 겁니다. 내가 안 정했으니 AI가 확률에서 뽑은 값이고, 1부에서 배운 대로 뽑기는 매번 다르니까요.</a:t>
             </a:r>
           </a:p>
           <a:p/>
           <a:p>
             <a:r>
               <a:rPr lang="ko-KR"/>
-              <a:t>(5분 정도 진행하며 순회. 서로 화면을 비교하게 유도합니다.) 옆 사람과 결과가 다르죠? 아래 박스처럼, 그 다름 자체가 오늘의 데이터입니다. 몇 명 결과를 화면에 띄워 비교해 봅시다.</a:t>
+              <a:t>같은 지시문인데 사람마다 결과가 다를 겁니다. 아래 박스처럼, 그 다름 자체가 오늘의 데이터입니다.</a:t>
             </a:r>
           </a:p>
           <a:p/>
           <a:p>
             <a:r>
               <a:rPr lang="ko-KR"/>
-              <a:t>(두세 명 화면을 프로젝터에 띄워 비교. 끝나면 파일 이름을 gradeA.py로 바꾸게 하고 B로.)</a:t>
+              <a:t>끝나면 파일 이름을 gradeA.py로 바꾸고 B 실험으로 넘어갑니다.</a:t>
             </a:r>
           </a:p>
         </p:txBody>
@@ -3035,7 +2993,7 @@
           <a:p>
             <a:r>
               <a:rPr lang="ko-KR"/>
-              <a:t>실험 B. 반드시 ＋ New Task로 새 대화를 열고, 이번엔 요구를 명확히 씁니다. "0부터 100 사이 정수 점수의 리스트를 받아서, 90 이상은 A, 80 이상은 B, 70 이상은 C, 60 이상은 D, 그 미만은 F로 바꾼 리스트를 반환하는 파이썬 함수를 만들어 줘." 슬라이드의 문장을 그대로 복사하세요.</a:t>
+              <a:t>실험 B. 반드시 New Task로 새 대화를 열고, 이번엔 요구를 명확히 씁니다. "0부터 100 사이 정수 점수의 리스트를 받아서, 90 이상은 A, 80 이상은 B, 70 이상은 C, 60 이상은 D, 그 미만은 F로 바꾼 리스트를 반환하는 파이썬 함수를 만들어 줘." 슬라이드의 문장을 그대로 복사하세요.</a:t>
             </a:r>
           </a:p>
           <a:p/>
@@ -3056,7 +3014,7 @@
           <a:p>
             <a:r>
               <a:rPr lang="ko-KR"/>
-              <a:t>B까지 하고 나면 감이 옵니다. 요구가 뼈대를 세우고, 나머지 기둥이 빈칸을 마저 채운다는 것. 그 완성형이 C입니다. (파일 이름을 gradeB.py로 바꾸고 C로.)</a:t>
+              <a:t>B까지 하고 나면 감이 옵니다. 요구가 뼈대를 세우고, 나머지 기둥이 빈칸을 마저 채운다는 것. 그 완성형이 C입니다. 파일 이름을 gradeB.py로 바꾸고 C 실험으로 넘어갑니다.</a:t>
             </a:r>
           </a:p>
         </p:txBody>
@@ -3279,7 +3237,7 @@
           <a:p>
             <a:r>
               <a:rPr lang="ko-KR"/>
-              <a:t>(10분 정도. 기록은 일단 메모장이든 VS Code든 어디든 적게 합니다.)</a:t>
+              <a:t>기록은 일단 메모장이든 VS Code든 어디든 적어 두세요.</a:t>
             </a:r>
           </a:p>
         </p:txBody>
@@ -3373,21 +3331,21 @@
           <a:p>
             <a:r>
               <a:rPr lang="ko-KR"/>
-              <a:t>①번. 기록을 파일로 만듭니다. VS Code 탐색기에서 hello-sw 폴더 안에 새 파일 → 이름은 notes.md. .md는 '마크다운'이라는 메모용 텍스트 파일 형식인데, 그냥 글을 쓰면 됩니다. 아까 적은 차이 3가지 이상을 문장으로 붙여넣고 Ctrl+S 저장.</a:t>
+              <a:t>1번. 기록을 파일로 만듭니다. VS Code 탐색기에서 hello-sw 폴더 안에 새 파일, 이름은 notes.md..md는 '마크다운'이라는 메모용 텍스트 파일 형식인데, 그냥 글을 쓰면 됩니다. 아까 적은 차이 3가지 이상을 문장으로 붙여넣고 Ctrl+S 저장.</a:t>
             </a:r>
           </a:p>
           <a:p/>
           <a:p>
             <a:r>
               <a:rPr lang="ko-KR"/>
-              <a:t>②번. 터미널에서 세 명령. git add 점, 이번엔 파일 이름 대신 점(.)입니다. 점은 "이 폴더에서 바뀐 파일 전부"라는 뜻이라, gradeA, B, C와 notes.md를 한 번에 담습니다. git commit -m "add grade experiments". git push. 지난주에 로그인해 뒀으니 이번엔 바로 올라갑니다.</a:t>
+              <a:t>2번. 터미널에서 세 명령. git add 점, 이번엔 파일 이름 대신 점(.)입니다. 점은 "이 폴더에서 바뀐 파일 전부"라는 뜻이라, gradeA, B, C와 notes.md를 한 번에 담습니다. git commit -m "add grade experiments". git push. 지난주에 로그인해 뒀으니 이번엔 바로 올라갑니다.</a:t>
             </a:r>
           </a:p>
           <a:p/>
           <a:p>
             <a:r>
               <a:rPr lang="ko-KR"/>
-              <a:t>확인은 왼쪽 화면처럼 브라우저에서 hello-sw 저장소를 새로고침해서 파일 목록에 네 파일이 보이면 성공입니다. 예시 화면은 제 강의 저장소라 파일 이름은 다르지만, 여러분 화면에는 ①번 자리에 gradeA.py, gradeB.py, gradeC.py, notes.md가, ②번 자리에 방금 쓴 커밋 메시지가 보여야 합니다.</a:t>
+              <a:t>확인은 왼쪽 화면처럼 브라우저에서 hello-sw 저장소를 새로고침해서 파일 목록에 네 파일이 보이면 성공입니다. 예시 화면은 제 강의 저장소라 파일 이름은 다르지만, 여러분 화면에는 1번 자리에 gradeA.py, gradeB.py, gradeC.py, notes.md가, 2번 자리에 방금 쓴 커밋 메시지가 보여야 합니다.</a:t>
             </a:r>
           </a:p>
           <a:p/>
@@ -3500,14 +3458,14 @@
           <a:p>
             <a:r>
               <a:rPr lang="ko-KR"/>
-              <a:t>아래 박스, 평가 포인트 세 가지, 네 기둥이 실제로 반영됐는지, 분석이 코드 근거를 인용하며 구체적인지, 그리고 설명 가능성. 제출물에 대해 구두로 물어볼 수 있습니다. AI로 만들되, 설명은 본인이, 1강 규칙 그대로입니다. 질문 받겠습니다.</a:t>
+              <a:t>아래 박스, 평가 포인트 세 가지, 네 기둥이 실제로 반영됐는지, 분석이 코드 근거를 인용하며 구체적인지, 그리고 설명 가능성. 제출물에 대해 구두로 물어볼 수 있습니다. AI로 만들되, 설명은 본인이, 1강 규칙 그대로입니다.</a:t>
             </a:r>
           </a:p>
           <a:p/>
           <a:p>
             <a:r>
               <a:rPr lang="ko-KR"/>
-              <a:t>(자주 나오는 질문: "기능을 친구와 같은 걸로 해도 되나요?" 하면 기능은 겹쳐도 되지만 지시문과 분석은 각자. "C 지시문을 슬라이드 것을 그대로 바꿔 써도 되나요?" 하면 구조는 가져다 쓰되 내용은 자기 기능에 맞게.)</a:t>
+              <a:t>자주 나오는 질문 두 가지. "기능을 친구와 같은 걸로 해도 되나요?" 기능은 겹쳐도 되지만 지시문과 분석은 각자 합니다. "C 지시문을 슬라이드 것을 그대로 바꿔 써도 되나요?" 구조는 가져다 쓰되 내용은 자기 기능에 맞게 바꿉니다.</a:t>
             </a:r>
           </a:p>
         </p:txBody>
@@ -3611,13 +3569,6 @@
               <a:t>특히 두 번째 항목, 새 대화 규칙을 안 지킨 분은 결과가 오염됐을 수 있으니 지금이라도 다시 돌려 보세요. 몇 분 안 걸립니다. 실험이 오염됐다는 게 무슨 뜻이냐면, 예를 들어 A 대화에 이어서 B를 시켰다면 AI가 A의 코드를 참고해서 B를 만들었을 수 있다는 겁니다. 그러면 B의 결과가 '요구만 준 지시문'의 순수한 결과가 아니게 되죠.</a:t>
             </a:r>
           </a:p>
-          <a:p/>
-          <a:p>
-            <a:r>
-              <a:rPr lang="ko-KR"/>
-              <a:t>(다섯 개 다 된 사람은 먼저 가도 되고, 안 된 사람은 남아서 마무리.)</a:t>
-            </a:r>
-          </a:p>
         </p:txBody>
       </p:sp>
       <p:sp>
@@ -3716,7 +3667,7 @@
           <a:p>
             <a:r>
               <a:rPr lang="ko-KR"/>
-              <a:t>둘째, 내가 비운 칸은 AI가 그럴듯하게 채웁니다. 그 결정의 책임은 나에게 남으니, 역할·맥락·요구·형식 네 기둥으로 중요한 빈칸을 내가 먼저 채웁니다.</a:t>
+              <a:t>둘째, 내가 비운 칸은 AI가 그럴듯하게 채웁니다. 그 결정의 책임은 나에게 남으니, 역할, 맥락, 요구, 형식 네 기둥으로 중요한 빈칸을 내가 먼저 채웁니다.</a:t>
             </a:r>
           </a:p>
           <a:p/>

--- a/data/생성형 AI 소프트웨어공학/생성형AI소프트웨어공학_3강.pptx
+++ b/data/생성형 AI 소프트웨어공학/생성형AI소프트웨어공학_3강.pptx
@@ -633,7 +633,7 @@
           <a:p>
             <a:r>
               <a:rPr lang="ko-KR"/>
-              <a:t>지난 시간 요약입니다. 왼쪽 세 줄. 정답 프로세스 모델은 없고 상황이 모델을 고른다. AI 시대의 개발은 지시, 생성, 확인, 수정의 초소형 스프린트 반복이다. 그리고 여러분 VS Code에는 AI 엔진이 연결됐다. 내 Gemini 키와 수업 공용 Z.ai 키, 두 개를 드롭다운으로 바꿔 쓰는 것까지 했죠. 오늘은 그 AI를 '잘 부리는 말'을 배웁니다.</a:t>
+              <a:t>지난 시간 요약입니다. 왼쪽 세 줄. 정답 프로세스 모델은 없고 상황이 모델을 고른다. AI 시대의 개발은 지시, 생성, 확인, 수정의 초소형 스프린트 반복이다. 그리고 여러분 노트북에는 AI 에이전트 둘이 연결됐다. VS Code 안의 Codex는 내 ChatGPT 계정으로, 따로 설치한 ZCode는 수업 공용 키로. 둘 다 '안녕'에 대답하는 것까지 확인했죠. 오늘은 그 AI를 '잘 부리는 말'을 배웁니다.</a:t>
             </a:r>
           </a:p>
           <a:p/>
@@ -1037,7 +1037,7 @@
           <a:p>
             <a:r>
               <a:rPr lang="ko-KR"/>
-              <a:t>이 뽑기의 과감함을 조절하는 다이얼이 온도, temperature입니다. 왼쪽 카드, 온도를 낮추면 가장 확률 높은 후보 위주로만 골라서 답이 비슷하게 반복됩니다. 정형적인 코드 생성에 유리하죠. 오른쪽 카드, 온도를 높이면 낮은 확률 후보도 종종 뽑아서 답이 다양하고 창의적이 되는 대신 예측이 어려워집니다. 시 쓰기나 아이디어 발산에 유리합니다. Cline 같은 코딩 도구는 코드 생성에 맞게 온도를 낮게 잡아 두는 편이지만, 그래도 0은 아니라서 매번 조금씩 다릅니다.</a:t>
+              <a:t>이 뽑기의 과감함을 조절하는 다이얼이 온도, temperature입니다. 왼쪽 카드, 온도를 낮추면 가장 확률 높은 후보 위주로만 골라서 답이 비슷하게 반복됩니다. 정형적인 코드 생성에 유리하죠. 오른쪽 카드, 온도를 높이면 낮은 확률 후보도 종종 뽑아서 답이 다양하고 창의적이 되는 대신 예측이 어려워집니다. 시 쓰기나 아이디어 발산에 유리합니다. Codex나 ZCode 같은 코딩 도구는 코드 생성에 맞게 온도를 낮게 잡아 두는 편이지만, 그래도 0은 아니라서 매번 조금씩 다릅니다.</a:t>
             </a:r>
           </a:p>
           <a:p/>
@@ -2462,7 +2462,7 @@
           <a:p>
             <a:r>
               <a:rPr lang="ko-KR"/>
-              <a:t>셋째, 그렇게 다듬은 지시문을 버리지 말고 기록하세요. 이 수업에서 지시문은 산출물입니다. 과제 1도 팀 프로젝트도, '어떤 지시로 이 결과를 얻었는가'를 함께 제출하고 평가합니다. Cline 대화창의 지시문을 복사해서 메모 파일에 붙여 두는 습관을 오늘부터.</a:t>
+              <a:t>셋째, 그렇게 다듬은 지시문을 버리지 말고 기록하세요. 이 수업에서 지시문은 산출물입니다. 과제 1도 팀 프로젝트도, '어떤 지시로 이 결과를 얻었는가'를 함께 제출하고 평가합니다. ZCode나 Codex 대화창의 지시문을 복사해서 메모 파일에 붙여 두는 습관을 오늘부터.</a:t>
             </a:r>
           </a:p>
           <a:p/>
@@ -2563,7 +2563,7 @@
           <a:p>
             <a:r>
               <a:rPr lang="ko-KR"/>
-              <a:t>이 실습 형식이 그대로 과제 1이 되니, 오늘 손을 제대로 움직인 사람은 과제의 절반을 끝내고 가는 셈입니다. 노트북 준비하시고, VS Code에서 지난주 hello-sw 폴더를 열고, Cline 패널을 열어 두세요. Cline이 지난주처럼 "안녕"에 대답하는지 한 번 확인하고 시작합니다. 엔진은 수업 공용 Z.ai(glm-5.3)로 맞춰 두세요. 설정 톱니바퀴를 눌러 API Provider가 OpenAI Compatible인지만 보면 됩니다. 2강 25쪽 그대로입니다. 공용 키가 막히면 Google Gemini로 돌려 내 키로 해도 실험은 됩니다. 다만 세 실험은 같은 엔진으로 해야 비교가 됩니다.</a:t>
+              <a:t>이 실습 형식이 그대로 과제 1이 되니, 오늘 손을 제대로 움직인 사람은 과제의 절반을 끝내고 가는 셈입니다. 노트북 준비하시고, ZCode를 켜서 지난주 hello-sw 폴더를 열고, '안녕'에 대답하는지 한 번 확인하고 시작합니다. 오늘 실험은 수업 공용 ZCode, 모델 GLM-5.3으로 합니다. ZCode가 안 되는 사람은 VS Code의 Codex로 해도 실험은 됩니다. 다만 세 실험은 같은 도구, 같은 모델로 해야 비교가 됩니다.</a:t>
             </a:r>
           </a:p>
         </p:txBody>
@@ -2664,7 +2664,7 @@
           <a:p>
             <a:r>
               <a:rPr lang="ko-KR"/>
-              <a:t>아래 박스, 실험 규칙 두 가지를 꼭 지켜 주세요. 첫째, 지시문 하나마다 Cline에서 '새 대화'를 시작합니다. 1부에서 배웠죠. 모델은 대화 전체를 다시 읽으니, 앞 실험의 대화가 남아 있으면 다음 실험이 오염됩니다. 공정한 비교를 위해 매번 깨끗한 상태에서 시작합니다. 둘째, 결과 파일 이름은 gradeA, gradeB, gradeC로 구분해 저장합니다. A와 B 실험에서는 AI가 이름을 정하게 두고, 여러분이 나중에 파일명만 바꿔 주세요. 셋째, 세 실험 모두 같은 엔진으로 돌립니다. 수업 공용 Z.ai의 glm-5.3입니다. 실험 A는 Gemini로, B는 Z.ai로 하면 지시문 차이인지 모델 차이인지 알 수 없게 됩니다. 변수는 지시문 하나만 바꿉니다. 과학 실험과 같은 원리입니다.</a:t>
+              <a:t>아래 박스, 실험 규칙 두 가지를 꼭 지켜 주세요. 첫째, 지시문 하나마다 ZCode에서 'New Task', 새 작업을 시작합니다. 1부에서 배웠죠. 모델은 대화 전체를 다시 읽으니, 앞 실험의 대화가 남아 있으면 다음 실험이 오염됩니다. 공정한 비교를 위해 매번 깨끗한 상태에서 시작합니다. 둘째, 결과 파일 이름은 gradeA, gradeB, gradeC로 구분해 저장합니다. A와 B 실험에서는 AI가 이름을 정하게 두고, 여러분이 나중에 파일명만 바꿔 주세요. 셋째, 세 실험 모두 같은 도구, 같은 모델로 돌립니다. 수업 공용 ZCode의 GLM-5.3입니다. 실험 A는 Codex로, B는 ZCode로 하면 지시문 차이인지 모델 차이인지 알 수 없게 됩니다. 변수는 지시문 하나만 바꿉니다. 과학 실험과 같은 원리입니다.</a:t>
             </a:r>
           </a:p>
           <a:p/>
@@ -2765,21 +2765,21 @@
           <a:p>
             <a:r>
               <a:rPr lang="ko-KR"/>
-              <a:t>1번, 새 대화. Cline 패널 위쪽에 아이콘이 몇 개 있는데, 그중 더하기 모양이 New Task, 새 대화입니다. 왼쪽 위 그림은 그 아이콘 배치를 그린 구성도입니다. 실험 A, B, C 각각 시작할 때 반드시 이 버튼을 먼저 누릅니다. 이유는 아까 말했죠. 앞 대화가 남아 있으면 다음 실험이 오염됩니다.</a:t>
+              <a:t>1번, 새 대화. ZCode 창 위쪽의 더하기 모양, New Task가 새 대화입니다. 왼쪽 위 그림은 그 자리를 그린 구성도입니다. Codex를 쓰는 사람은 패널 위의 더하기, New chat이 같은 역할입니다. 실험 A, B, C 각각 시작할 때 반드시 이 버튼을 먼저 누릅니다. 이유는 아까 말했죠. 앞 대화가 남아 있으면 다음 실험이 오염됩니다.</a:t>
             </a:r>
           </a:p>
           <a:p/>
           <a:p>
             <a:r>
               <a:rPr lang="ko-KR"/>
-              <a:t>2번, 지시문 붙여넣기. 왼쪽 가운데 그림이 Cline 패널 맨 아래 입력창입니다. 슬라이드에 있는 지시문을 그대로 복사해서 붙여넣고 Enter. 오타 하나가 결과를 바꾸니 직접 치지 말고 복사하세요. LMS에 지시문 텍스트를 올려 두었으니 거기서 복사해도 됩니다.</a:t>
+              <a:t>2번, 지시문 붙여넣기. 왼쪽 가운데 그림이 ZCode의 입력창입니다. 슬라이드에 있는 지시문을 그대로 복사해서 붙여넣고 보내기. 오타 하나가 결과를 바꾸니 직접 치지 말고 복사하세요. LMS에 지시문 텍스트를 올려 두었으니 거기서 복사해도 됩니다.</a:t>
             </a:r>
           </a:p>
           <a:p/>
           <a:p>
             <a:r>
               <a:rPr lang="ko-KR"/>
-              <a:t>3번, 승인. Cline은 파일을 만들기 전에 "이 파일을 이렇게 만들겠다"며 내용을 보여 주고 기다립니다. 오른쪽 그림은 명령을 실행하기 전 승인을 기다리는 화면 예시입니다. 무조건 누르지 말고 훑어보고 Save 또는 Approve. 파일이 생기면 왼쪽 탐색기에 나타납니다.</a:t>
+              <a:t>3번, 승인. ZCode는 기본 모드 'Ask before changes'에서 파일을 만들기 전에 "이 파일을 이렇게 만들겠다"며 내용을 보여 주고 기다립니다. 오른쪽 그림이 그 모드 목록인데, 맨 위 기본값을 그대로 둡니다. 무조건 누르지 말고 훑어보고 Allow. 파일이 생기면 ZCode 왼쪽 파일 목록과 VS Code 탐색기에 같이 나타납니다. Codex도 같은 식으로 묻습니다.</a:t>
             </a:r>
           </a:p>
           <a:p/>
@@ -2807,7 +2807,7 @@
           <a:p>
             <a:r>
               <a:rPr lang="ko-KR"/>
-              <a:t>(엔진은 2강에서 설정한 그대로 씁니다. 수업 시간에는 공용 Z.ai 키(glm-5.3), 집에서는 내 Gemini 키(gemini-3.5-flash-lite). Gemini 무료 등급 분당 한도 때문에 429가 뜨면 Cline이 알아서 몇십 초 기다렸다 재시도하니 그냥 두면 되고, 실험 세 번이면 하루 한도(flash-lite 500회) 안에서 충분히 끝납니다. Z.ai 쪽에서 1302가 뜨는 것도 같은 성격, 동시 접속이 몰린 것이라 기다리면 풀립니다.)</a:t>
+              <a:t>도구는 2강에서 연결한 그대로 씁니다. 수업 시간에는 ZCode, GLM-5.3. 'Rate limit'이나 1302가 뜨면 반 전체가 같은 키로 동시에 눌러 줄을 선 것이니 몇 초 뒤 다시 보내면 됩니다. 실험 세 번이면 한도 안에서 충분히 끝납니다.</a:t>
             </a:r>
           </a:p>
         </p:txBody>
@@ -3352,7 +3352,7 @@
           <a:p>
             <a:r>
               <a:rPr lang="ko-KR"/>
-              <a:t>아래 분홍 박스, push 전 마지막 점검 하나. 2강에서 API 키는 절대 코드에 넣지 말라고 했죠. AI가 만든 코드에 키가 들어갈 일은 없지만, 습관으로 확인합니다. VS Code에서 Ctrl+Shift+F, 전체 검색창에 AIza 라고 쳐서 결과가 0건이면 안전. 공용 Z.ai 키는 AIza로 시작하지 않으니, 수업 시간에 알려 드린 키의 앞 여섯 글자로 한 번 더 검색해서 0건인지 봅니다. 두 검색 다 0건이면 올려도 됩니다. 올린 뒤 저장소 주소를 LMS 3주차 게시판에 제출하면 오늘 출석 인증 완료입니다.</a:t>
+              <a:t>아래 분홍 박스, push 전 마지막 점검 하나. 2강에서 API 키는 절대 코드에 넣지 말라고 했죠. AI가 만든 코드에 키가 들어갈 일은 없지만, 습관으로 확인합니다. VS Code에서 Ctrl+Shift+F, 전체 검색창에 수업 시간에 알려 드린 공용 키의 앞 여섯 글자를 쳐서 결과가 0건이면 안전. 키는 ZCode 설정 안에만 있고 코드에는 없어야 정상입니다. 올린 뒤 저장소 주소를 LMS 3주차 게시판에 제출하면 오늘 출석 인증 완료입니다.</a:t>
             </a:r>
           </a:p>
           <a:p/>
@@ -12296,7 +12296,7 @@
                 <a:ea typeface="Malgun Gothic" pitchFamily="34" charset="-122"/>
                 <a:cs typeface="Malgun Gothic" pitchFamily="34" charset="-120"/>
               </a:rPr>
-              <a:t>그리고 여러분의 VS Code에는 이제 AI 엔진(내 Gemini 키, 수업 공용 Z.ai 키)이 연결되어 있습니다. 오늘은 그 AI를 '잘 부리는 말'을 배웁니다.</a:t>
+              <a:t>그리고 여러분 노트북에는 이제 AI 에이전트 둘, Codex(내 ChatGPT 계정)와 ZCode(수업 공용 키)가 연결되어 있습니다. 오늘은 그 AI를 '잘 부리는 말'을 배웁니다.</a:t>
             </a:r>
             <a:endParaRPr lang="en-US" sz="1200" dirty="0"/>
           </a:p>
@@ -14136,7 +14136,7 @@
                 <a:ea typeface="Malgun Gothic" pitchFamily="34" charset="-122"/>
                 <a:cs typeface="Malgun Gothic" pitchFamily="34" charset="-120"/>
               </a:rPr>
-              <a:t>지시문마다 Cline에서 '새 대화'로 시작합니다(앞 대화가 다음 실험을 오염시키지 않도록. 1부 맥락 창). 결과는 각각 gradeA.py · gradeB.py · gradeC.py로 저장합니다. 세 실험 모두 같은 엔진(수업 공용 Z.ai glm-5.3)으로 돌립니다. 중간에 엔진을 바꾸면 비교가 안 됩니다.</a:t>
+              <a:t>지시문마다 ZCode에서 'New Task'(새 작업)로 시작합니다(앞 대화가 다음 실험을 오염시키지 않도록. 1부 맥락 창). 결과는 각각 gradeA.py · gradeB.py · gradeC.py로 저장합니다. 세 실험 모두 같은 도구, 같은 모델(ZCode, GLM-5.3)로 돌립니다. 중간에 바꾸면 비교가 안 됩니다.</a:t>
             </a:r>
             <a:endParaRPr lang="en-US" sz="1300" dirty="0"/>
           </a:p>
@@ -14436,7 +14436,7 @@
                 <a:ea typeface="Malgun Gothic" pitchFamily="34" charset="-122"/>
                 <a:cs typeface="Malgun Gothic" pitchFamily="34" charset="-120"/>
               </a:rPr>
-              <a:t>Cline</a:t>
+              <a:t>ZCode</a:t>
             </a:r>
           </a:p>
         </p:txBody>
@@ -14678,7 +14678,7 @@
                 <a:ea typeface="Malgun Gothic" pitchFamily="34" charset="-122"/>
                 <a:cs typeface="Malgun Gothic" pitchFamily="34" charset="-120"/>
               </a:rPr>
-              <a:t>History</a:t>
+              <a:t>Tasks</a:t>
             </a:r>
           </a:p>
         </p:txBody>
@@ -14921,7 +14921,7 @@
                 <a:ea typeface="Malgun Gothic" pitchFamily="34" charset="-122"/>
                 <a:cs typeface="Malgun Gothic" pitchFamily="34" charset="-120"/>
               </a:rPr>
-              <a:t>Cline 패널 위쪽 아이콘 구성도. ＋(New Task)가 '새 대화', ⚙(Settings)에서 엔진이 공용 Z.ai(glm-5.3)인지 확인. A·B·C 각각 시작 전에 ＋를 반드시 누릅니다.</a:t>
+              <a:t>ZCode 창 위쪽 구성도. ＋(New Task)가 '새 대화'입니다. 실험 A·B·C 각각 시작 전에 반드시 누릅니다. Codex라면 패널의 '＋ New chat'.</a:t>
             </a:r>
           </a:p>
         </p:txBody>
@@ -14929,6 +14929,72 @@
       <p:pic>
         <p:nvPicPr>
           <p:cNvPr id="20" name="Picture 19" descr="cline_input.png"/>
+          <p:cNvPicPr>
+            <a:picLocks noChangeAspect="1"/>
+          </p:cNvPicPr>
+          <p:nvPr/>
+        </p:nvPicPr>
+        <p:blipFill>
+          <a:blip r:embed="rId7"/>
+          <a:stretch>
+            <a:fillRect/>
+          </a:stretch>
+        </p:blipFill>
+        <p:spPr>
+          <a:xfrm>
+            <a:off x="658368" y="2880360"/>
+            <a:ext cx="2651760" cy="617219"/>
+          </a:xfrm>
+          <a:prstGeom prst="rect">
+            <a:avLst/>
+          </a:prstGeom>
+        </p:spPr>
+      </p:pic>
+      <p:sp>
+        <p:nvSpPr>
+          <p:cNvPr id="21" name="TextBox 20"/>
+          <p:cNvSpPr txBox="1"/>
+          <p:nvPr/>
+        </p:nvSpPr>
+        <p:spPr>
+          <a:xfrm>
+            <a:off x="658368" y="3575304"/>
+            <a:ext cx="2651760" cy="457200"/>
+          </a:xfrm>
+          <a:prstGeom prst="rect">
+            <a:avLst/>
+          </a:prstGeom>
+          <a:noFill/>
+        </p:spPr>
+        <p:txBody>
+          <a:bodyPr wrap="square" lIns="0" rIns="0" tIns="0" bIns="0" anchor="t" rtlCol="0">
+            <a:spAutoFit/>
+          </a:bodyPr>
+          <a:lstStyle/>
+          <a:p>
+            <a:pPr indent="0" marL="0" algn="l">
+              <a:lnSpc>
+                <a:spcPts val="1215"/>
+              </a:lnSpc>
+              <a:buNone/>
+            </a:pPr>
+            <a:r>
+              <a:rPr lang="ko-KR" sz="900" b="0">
+                <a:solidFill>
+                  <a:srgbClr val="6B7185"/>
+                </a:solidFill>
+                <a:latin typeface="Malgun Gothic" pitchFamily="34" charset="0"/>
+                <a:ea typeface="Malgun Gothic" pitchFamily="34" charset="-122"/>
+                <a:cs typeface="Malgun Gothic" pitchFamily="34" charset="-120"/>
+              </a:rPr>
+              <a:t>② 입력창에 지시문을 붙여넣고 보내기 (출처: ZCode 공식 문서)</a:t>
+            </a:r>
+          </a:p>
+        </p:txBody>
+      </p:sp>
+      <p:pic>
+        <p:nvPicPr>
+          <p:cNvPr id="22" name="Picture 21" descr="cline_approve_cmd.png"/>
           <p:cNvPicPr>
             <a:picLocks noChangeAspect="1"/>
           </p:cNvPicPr>
@@ -14942,8 +15008,8 @@
         </p:blipFill>
         <p:spPr>
           <a:xfrm>
-            <a:off x="658368" y="2880360"/>
-            <a:ext cx="2651760" cy="1910166"/>
+            <a:off x="3611880" y="2880360"/>
+            <a:ext cx="1883238" cy="1874519"/>
           </a:xfrm>
           <a:prstGeom prst="rect">
             <a:avLst/>
@@ -14952,14 +15018,14 @@
       </p:pic>
       <p:sp>
         <p:nvSpPr>
-          <p:cNvPr id="21" name="TextBox 20"/>
+          <p:cNvPr id="23" name="TextBox 22"/>
           <p:cNvSpPr txBox="1"/>
           <p:nvPr/>
         </p:nvSpPr>
         <p:spPr>
           <a:xfrm>
-            <a:off x="658368" y="4827102"/>
-            <a:ext cx="2651760" cy="457200"/>
+            <a:off x="3611880" y="4873110"/>
+            <a:ext cx="2715768" cy="457200"/>
           </a:xfrm>
           <a:prstGeom prst="rect">
             <a:avLst/>
@@ -14987,73 +15053,7 @@
                 <a:ea typeface="Malgun Gothic" pitchFamily="34" charset="-122"/>
                 <a:cs typeface="Malgun Gothic" pitchFamily="34" charset="-120"/>
               </a:rPr>
-              <a:t>② 맨 아래 입력창에 지시문을 붙여넣고 Enter (출처: Cline README)</a:t>
-            </a:r>
-          </a:p>
-        </p:txBody>
-      </p:sp>
-      <p:pic>
-        <p:nvPicPr>
-          <p:cNvPr id="22" name="Picture 21" descr="cline_approve_cmd.png"/>
-          <p:cNvPicPr>
-            <a:picLocks noChangeAspect="1"/>
-          </p:cNvPicPr>
-          <p:nvPr/>
-        </p:nvPicPr>
-        <p:blipFill>
-          <a:blip r:embed="rId4"/>
-          <a:stretch>
-            <a:fillRect/>
-          </a:stretch>
-        </p:blipFill>
-        <p:spPr>
-          <a:xfrm>
-            <a:off x="3611880" y="2880360"/>
-            <a:ext cx="2377440" cy="1956174"/>
-          </a:xfrm>
-          <a:prstGeom prst="rect">
-            <a:avLst/>
-          </a:prstGeom>
-        </p:spPr>
-      </p:pic>
-      <p:sp>
-        <p:nvSpPr>
-          <p:cNvPr id="23" name="TextBox 22"/>
-          <p:cNvSpPr txBox="1"/>
-          <p:nvPr/>
-        </p:nvSpPr>
-        <p:spPr>
-          <a:xfrm>
-            <a:off x="3611880" y="4873110"/>
-            <a:ext cx="2715768" cy="457200"/>
-          </a:xfrm>
-          <a:prstGeom prst="rect">
-            <a:avLst/>
-          </a:prstGeom>
-          <a:noFill/>
-        </p:spPr>
-        <p:txBody>
-          <a:bodyPr wrap="square" lIns="0" rIns="0" tIns="0" bIns="0" anchor="t" rtlCol="0">
-            <a:spAutoFit/>
-          </a:bodyPr>
-          <a:lstStyle/>
-          <a:p>
-            <a:pPr indent="0" marL="0" algn="l">
-              <a:lnSpc>
-                <a:spcPts val="1215"/>
-              </a:lnSpc>
-              <a:buNone/>
-            </a:pPr>
-            <a:r>
-              <a:rPr lang="ko-KR" sz="900" b="0">
-                <a:solidFill>
-                  <a:srgbClr val="6B7185"/>
-                </a:solidFill>
-                <a:latin typeface="Malgun Gothic" pitchFamily="34" charset="0"/>
-                <a:ea typeface="Malgun Gothic" pitchFamily="34" charset="-122"/>
-                <a:cs typeface="Malgun Gothic" pitchFamily="34" charset="-120"/>
-              </a:rPr>
-              <a:t>③ 파일 만들기·명령 실행 전 승인을 기다립니다. 읽고 승인 (출처: Cline README)</a:t>
+              <a:t>③ 파일을 만들기 전에 'Ask before changes' 모드가 허락을 묻습니다. 읽고 Allow (출처: ZCode 공식 문서)</a:t>
             </a:r>
           </a:p>
         </p:txBody>
@@ -15896,7 +15896,7 @@
                 <a:ea typeface="Malgun Gothic" pitchFamily="34" charset="-122"/>
                 <a:cs typeface="Malgun Gothic" pitchFamily="34" charset="-120"/>
               </a:rPr>
-              <a:t>Cline이 만들 파일 내용을 보여 주면 훑어보고 Save/Approve. 명령 실행도 마찬가지.</a:t>
+              <a:t>ZCode가 만들 파일 내용을 보여 주면 훑어보고 Allow. 명령 실행도 마찬가지. Codex도 같은 식으로 묻습니다.</a:t>
             </a:r>
           </a:p>
         </p:txBody>
@@ -21115,7 +21115,7 @@
                 <a:ea typeface="Malgun Gothic" pitchFamily="34" charset="-122"/>
                 <a:cs typeface="Malgun Gothic" pitchFamily="34" charset="-120"/>
               </a:rPr>
-              <a:t>push 전 마지막 점검: 파일 안에 API 키(Gemini 'AIza…', Z.ai 공용 키)가 없는지</a:t>
+              <a:t>push 전 마지막 점검: 파일 안에 수업 공용 키가 없는지</a:t>
             </a:r>
           </a:p>
           <a:p>
@@ -21134,7 +21134,7 @@
                 <a:ea typeface="Malgun Gothic" pitchFamily="34" charset="-122"/>
                 <a:cs typeface="Malgun Gothic" pitchFamily="34" charset="-120"/>
               </a:rPr>
-              <a:t>AI가 만든 코드에 키가 들어갈 일은 없지만, 2강 규칙이니 습관처럼 확인합니다 (Ctrl+Shift+F 로 AIza 와 Z.ai 키 앞 여섯 글자 검색 → 0건). 올린 뒤 저장소 주소를 LMS 3주차 게시판에 제출하면 오늘 출석 인증 완료.</a:t>
+              <a:t>AI가 만든 코드에 키가 들어갈 일은 없지만, 2강 규칙이니 습관처럼 확인합니다 (Ctrl+Shift+F 로 공용 키 앞 여섯 글자 검색 → 0건). 올린 뒤 저장소 주소를 LMS 3주차 게시판에 제출하면 오늘 출석 인증 완료.</a:t>
             </a:r>
           </a:p>
         </p:txBody>

--- a/data/생성형 AI 소프트웨어공학/생성형AI소프트웨어공학_3강.pptx
+++ b/data/생성형 AI 소프트웨어공학/생성형AI소프트웨어공학_3강.pptx
@@ -633,7 +633,7 @@
           <a:p>
             <a:r>
               <a:rPr lang="ko-KR"/>
-              <a:t>지난 시간 요약입니다. 왼쪽 세 줄. 정답 프로세스 모델은 없고 상황이 모델을 고른다. AI 시대의 개발은 지시, 생성, 확인, 수정의 초소형 스프린트 반복이다. 그리고 여러분 노트북에는 AI 에이전트 둘이 연결됐다. VS Code 안의 Codex는 내 ChatGPT 계정으로, 따로 설치한 ZCode는 수업 공용 키로. 둘 다 '안녕'에 대답하는 것까지 확인했죠. 오늘은 그 AI를 '잘 부리는 말'을 배웁니다.</a:t>
+              <a:t>지난 시간 요약입니다. 왼쪽 세 줄. 정답 프로세스 모델은 없고 상황이 모델을 고른다. AI 시대의 개발은 지시, 생성, 확인, 수정의 초소형 스프린트 반복이다. 그리고 여러분 노트북에는 AI 에이전트 둘이 연결됐다. VS Code 안의 Codex는 내 ChatGPT 계정으로, 따로 설치한 ZCode는 수업 공용 계정으로. 둘 다 '안녕'에 대답하는 것까지 확인했죠. 오늘은 그 AI를 '잘 부리는 말'을 배웁니다.</a:t>
             </a:r>
           </a:p>
           <a:p/>
@@ -2563,7 +2563,7 @@
           <a:p>
             <a:r>
               <a:rPr lang="ko-KR"/>
-              <a:t>이 실습 형식이 그대로 과제 1이 되니, 오늘 손을 제대로 움직인 사람은 과제의 절반을 끝내고 가는 셈입니다. 노트북 준비하시고, ZCode를 켜서 지난주 hello-sw 폴더를 열고, '안녕'에 대답하는지 한 번 확인하고 시작합니다. 오늘 실험은 수업 공용 ZCode, 모델 GLM-5.3으로 합니다. ZCode가 안 되는 사람은 VS Code의 Codex로 해도 실험은 됩니다. 다만 세 실험은 같은 도구, 같은 모델로 해야 비교가 됩니다.</a:t>
+              <a:t>이 실습 형식이 그대로 과제 1이 되니, 오늘 손을 제대로 움직인 사람은 과제의 절반을 끝내고 가는 셈입니다. 노트북 준비하시고, ZCode를 켜서 지난주 hello-sw 폴더를 열고, '안녕'에 대답하는지 한 번 확인하고 시작합니다. 왼쪽 아래가 'Connect'로 바뀌어 있으면 공용 계정 연결이 풀린 것이니 질문하세요. 제가 다시 로그인해 드립니다. 오늘 실험은 수업 공용 ZCode, 모델 GLM-5.3으로 합니다. ZCode가 안 되는 사람은 VS Code의 Codex로 해도 실험은 됩니다. 다만 세 실험은 같은 도구, 같은 모델로 해야 비교가 됩니다.</a:t>
             </a:r>
           </a:p>
         </p:txBody>
@@ -2807,7 +2807,7 @@
           <a:p>
             <a:r>
               <a:rPr lang="ko-KR"/>
-              <a:t>도구는 2강에서 연결한 그대로 씁니다. 수업 시간에는 ZCode, GLM-5.3. 'Rate limit'이나 1302가 뜨면 반 전체가 같은 키로 동시에 눌러 줄을 선 것이니 몇 초 뒤 다시 보내면 됩니다. 실험 세 번이면 한도 안에서 충분히 끝납니다.</a:t>
+              <a:t>도구는 2강에서 연결한 그대로 씁니다. 수업 시간에는 ZCode, GLM-5.3. 'Rate limit'이나 1302가 뜨면 반 전체가 같은 계정으로 동시에 눌러 줄을 선 것이니 몇 초 뒤 다시 보내면 됩니다. 실험 세 번이면 한도 안에서 충분히 끝납니다.</a:t>
             </a:r>
           </a:p>
         </p:txBody>
@@ -3352,7 +3352,7 @@
           <a:p>
             <a:r>
               <a:rPr lang="ko-KR"/>
-              <a:t>아래 분홍 박스, push 전 마지막 점검 하나. 2강에서 API 키는 절대 코드에 넣지 말라고 했죠. AI가 만든 코드에 키가 들어갈 일은 없지만, 습관으로 확인합니다. VS Code에서 Ctrl+Shift+F, 전체 검색창에 수업 시간에 알려 드린 공용 키의 앞 여섯 글자를 쳐서 결과가 0건이면 안전. 키는 ZCode 설정 안에만 있고 코드에는 없어야 정상입니다. 올린 뒤 저장소 주소를 LMS 3주차 게시판에 제출하면 오늘 출석 인증 완료입니다.</a:t>
+              <a:t>아래 분홍 박스, push 전 마지막 점검 하나. 2강에서 API 키는 절대 코드에 넣지 말라고 했죠. AI가 만든 코드에 키가 들어갈 일은 없지만, 습관으로 확인합니다. VS Code에서 Ctrl+Shift+F, 전체 검색창에 key, password, token 같은 단어를 쳐서 의심스러운 값이 안 나오면 통과. 로그인은 도구 설정 안에서 했으니 코드에는 아무 비밀도 없어야 정상입니다. 올린 뒤 저장소 주소를 LMS 3주차 게시판에 제출하면 오늘 출석 인증 완료입니다.</a:t>
             </a:r>
           </a:p>
           <a:p/>
@@ -12296,7 +12296,7 @@
                 <a:ea typeface="Malgun Gothic" pitchFamily="34" charset="-122"/>
                 <a:cs typeface="Malgun Gothic" pitchFamily="34" charset="-120"/>
               </a:rPr>
-              <a:t>그리고 여러분 노트북에는 이제 AI 에이전트 둘, Codex(내 ChatGPT 계정)와 ZCode(수업 공용 키)가 연결되어 있습니다. 오늘은 그 AI를 '잘 부리는 말'을 배웁니다.</a:t>
+              <a:t>그리고 여러분 노트북에는 이제 AI 에이전트 둘, Codex(내 ChatGPT 계정)와 ZCode(수업 공용 계정)가 연결되어 있습니다. 오늘은 그 AI를 '잘 부리는 말'을 배웁니다.</a:t>
             </a:r>
             <a:endParaRPr lang="en-US" sz="1200" dirty="0"/>
           </a:p>
@@ -21115,7 +21115,7 @@
                 <a:ea typeface="Malgun Gothic" pitchFamily="34" charset="-122"/>
                 <a:cs typeface="Malgun Gothic" pitchFamily="34" charset="-120"/>
               </a:rPr>
-              <a:t>push 전 마지막 점검: 파일 안에 수업 공용 키가 없는지</a:t>
+              <a:t>push 전 마지막 점검: 파일 안에 키나 비밀번호가 없는지</a:t>
             </a:r>
           </a:p>
           <a:p>
@@ -21134,7 +21134,7 @@
                 <a:ea typeface="Malgun Gothic" pitchFamily="34" charset="-122"/>
                 <a:cs typeface="Malgun Gothic" pitchFamily="34" charset="-120"/>
               </a:rPr>
-              <a:t>AI가 만든 코드에 키가 들어갈 일은 없지만, 2강 규칙이니 습관처럼 확인합니다 (Ctrl+Shift+F 로 공용 키 앞 여섯 글자 검색 → 0건). 올린 뒤 저장소 주소를 LMS 3주차 게시판에 제출하면 오늘 출석 인증 완료.</a:t>
+              <a:t>AI가 만든 코드에 비밀이 들어갈 일은 없지만, 2강 규칙이니 습관처럼 확인합니다 (Ctrl+Shift+F 로 key, password, token 검색 → 의심스러운 게 없으면 통과). 올린 뒤 저장소 주소를 LMS 3주차 게시판에 제출하면 오늘 출석 인증 완료.</a:t>
             </a:r>
           </a:p>
         </p:txBody>

--- a/data/생성형 AI 소프트웨어공학/생성형AI소프트웨어공학_3강.pptx
+++ b/data/생성형 AI 소프트웨어공학/생성형AI소프트웨어공학_3강.pptx
@@ -3761,7 +3761,7 @@
           <a:p>
             <a:r>
               <a:rPr lang="ko-KR"/>
-              <a:t>다음 주 예고입니다. 4주차는 지시문 심화, 오늘 배운 네 기둥 위에 세 가지를 얹습니다.</a:t>
+              <a:t>다음 주 예고입니다. 4강의 제목은 딸깍의 경계입니다. 요즘 말로 딸깍, 그러니까 지시 한 번으로 끝나는 일과 그렇지 않은 일을 가르는 기준을 배우고, 실험으로 직접 재 봅니다. 4주차는 지시문 심화, 오늘 배운 네 기둥 위에 세 가지를 얹습니다.</a:t>
             </a:r>
           </a:p>
           <a:p/>
@@ -23909,7 +23909,7 @@
                 <a:ea typeface="Malgun Gothic" pitchFamily="34" charset="-122"/>
                 <a:cs typeface="Malgun Gothic" pitchFamily="34" charset="-120"/>
               </a:rPr>
-              <a:t>다음 주: 지시문 심화</a:t>
+              <a:t>다음 주: 지시문 심화, 딸깍의 경계</a:t>
             </a:r>
             <a:endParaRPr lang="en-US" sz="2600" dirty="0"/>
           </a:p>
